--- a/classes/parte-4-seguridad-de-aplicaciones-web/093-sqlmap/clase-093-presentacion.pptx
+++ b/classes/parte-4-seguridad-de-aplicaciones-web/093-sqlmap/clase-093-presentacion.pptx
@@ -17,6 +17,9 @@
     <p:sldId id="265" r:id="rId16"/>
     <p:sldId id="266" r:id="rId17"/>
     <p:sldId id="267" r:id="rId18"/>
+    <p:sldId id="268" r:id="rId19"/>
+    <p:sldId id="269" r:id="rId20"/>
+    <p:sldId id="270" r:id="rId21"/>
   </p:sldIdLst>
   <p:sldSz cx="9144000" cy="6858000" type="screen4x3"/>
   <p:notesSz cx="6858000" cy="9144000"/>
@@ -3198,7 +3201,7 @@
                   <a:srgbClr val="0B3D2E"/>
                 </a:solidFill>
               </a:rPr>
-              <a:t>⚠️ Errores comunes</a:t>
+              <a:t>✍️ Ejercicios</a:t>
             </a:r>
           </a:p>
         </p:txBody>
@@ -3236,67 +3239,82 @@
                   <a:srgbClr val="22282E"/>
                 </a:solidFill>
               </a:rPr>
-              <a:t>•  "all tested parameters do not appear to be injectable" — Sube --level/--risk o revisa el parámetro correcto</a:t>
-            </a:r>
-          </a:p>
-          <a:p>
-            <a:pPr>
-              <a:spcAft>
-                <a:spcPts val="600"/>
-              </a:spcAft>
-            </a:pPr>
-            <a:r>
-              <a:rPr sz="1500">
-                <a:solidFill>
-                  <a:srgbClr val="22282E"/>
-                </a:solidFill>
-              </a:rPr>
-              <a:t>•  No respeta la sesión — Falta --cookie o el token caducó</a:t>
-            </a:r>
-          </a:p>
-          <a:p>
-            <a:pPr>
-              <a:spcAft>
-                <a:spcPts val="600"/>
-              </a:spcAft>
-            </a:pPr>
-            <a:r>
-              <a:rPr sz="1500">
-                <a:solidFill>
-                  <a:srgbClr val="22282E"/>
-                </a:solidFill>
-              </a:rPr>
-              <a:t>•  Escaneo eterno — Limita --technique y usa --batch</a:t>
-            </a:r>
-          </a:p>
-          <a:p>
-            <a:pPr>
-              <a:spcAft>
-                <a:spcPts val="600"/>
-              </a:spcAft>
-            </a:pPr>
-            <a:r>
-              <a:rPr sz="1500">
-                <a:solidFill>
-                  <a:srgbClr val="22282E"/>
-                </a:solidFill>
-              </a:rPr>
-              <a:t>•  Datos corruptos por --risk=3 — Payloads stacked; baja el riesgo</a:t>
-            </a:r>
-          </a:p>
-          <a:p>
-            <a:pPr>
-              <a:spcAft>
-                <a:spcPts val="600"/>
-              </a:spcAft>
-            </a:pPr>
-            <a:r>
-              <a:rPr sz="1500">
-                <a:solidFill>
-                  <a:srgbClr val="22282E"/>
-                </a:solidFill>
-              </a:rPr>
-              <a:t>•  Bloqueado por WAF — Prueba tamper scripts adecuados, con permiso</a:t>
+              <a:t>•  Detecta el motor y la versión con --banner.</a:t>
+            </a:r>
+          </a:p>
+          <a:p>
+            <a:pPr>
+              <a:spcAft>
+                <a:spcPts val="600"/>
+              </a:spcAft>
+            </a:pPr>
+            <a:r>
+              <a:rPr sz="1500">
+                <a:solidFill>
+                  <a:srgbClr val="22282E"/>
+                </a:solidFill>
+              </a:rPr>
+              <a:t>•  Compara resultados con --technique=BT vs. la selección automática.</a:t>
+            </a:r>
+          </a:p>
+          <a:p>
+            <a:pPr>
+              <a:spcAft>
+                <a:spcPts val="600"/>
+              </a:spcAft>
+            </a:pPr>
+            <a:r>
+              <a:rPr sz="1500">
+                <a:solidFill>
+                  <a:srgbClr val="22282E"/>
+                </a:solidFill>
+              </a:rPr>
+              <a:t>•  Usa --tamper=space2comment contra un filtro que bloquea espacios.</a:t>
+            </a:r>
+          </a:p>
+          <a:p>
+            <a:pPr>
+              <a:spcAft>
+                <a:spcPts val="600"/>
+              </a:spcAft>
+            </a:pPr>
+            <a:r>
+              <a:rPr sz="1500">
+                <a:solidFill>
+                  <a:srgbClr val="22282E"/>
+                </a:solidFill>
+              </a:rPr>
+              <a:t>•  Volca solo el usuario admin usando --where.</a:t>
+            </a:r>
+          </a:p>
+          <a:p>
+            <a:pPr>
+              <a:spcAft>
+                <a:spcPts val="600"/>
+              </a:spcAft>
+            </a:pPr>
+            <a:r>
+              <a:rPr sz="1500">
+                <a:solidFill>
+                  <a:srgbClr val="22282E"/>
+                </a:solidFill>
+              </a:rPr>
+              <a:t>•  Explica por qué --os-shell es peligroso y cuándo (no) usarlo.</a:t>
+            </a:r>
+          </a:p>
+          <a:p>
+            <a:pPr>
+              <a:spcAft>
+                <a:spcPts val="600"/>
+              </a:spcAft>
+            </a:pPr>
+            <a:r>
+              <a:rPr sz="1500">
+                <a:solidFill>
+                  <a:srgbClr val="22282E"/>
+                </a:solidFill>
+              </a:rPr>
+              <a:t>•  Documenta el impacto real del dump: ¿qué datos y qué gravedad?</a:t>
             </a:r>
           </a:p>
         </p:txBody>
@@ -3347,7 +3365,7 @@
                   <a:srgbClr val="0B3D2E"/>
                 </a:solidFill>
               </a:rPr>
-              <a:t>❓ Preguntas frecuentes</a:t>
+              <a:t>📝 Reto verificable</a:t>
             </a:r>
           </a:p>
         </p:txBody>
@@ -3385,82 +3403,22 @@
                   <a:srgbClr val="22282E"/>
                 </a:solidFill>
               </a:rPr>
-              <a:t>•  ❓ ¿sqlmap sustituye al conocimiento manual?</a:t>
-            </a:r>
-          </a:p>
-          <a:p>
-            <a:pPr>
-              <a:spcAft>
-                <a:spcPts val="600"/>
-              </a:spcAft>
-            </a:pPr>
-            <a:r>
-              <a:rPr sz="1500">
-                <a:solidFill>
-                  <a:srgbClr val="22282E"/>
-                </a:solidFill>
-              </a:rPr>
-              <a:t>•  No. Automatiza lo tedioso, pero necesitas entender la SQLi para dirigirla, validar resultados y evitar destrozos.</a:t>
-            </a:r>
-          </a:p>
-          <a:p>
-            <a:pPr>
-              <a:spcAft>
-                <a:spcPts val="600"/>
-              </a:spcAft>
-            </a:pPr>
-            <a:r>
-              <a:rPr sz="1500">
-                <a:solidFill>
-                  <a:srgbClr val="22282E"/>
-                </a:solidFill>
-              </a:rPr>
-              <a:t>•  ❓ ¿Por qué empezar con la request de Burp?</a:t>
-            </a:r>
-          </a:p>
-          <a:p>
-            <a:pPr>
-              <a:spcAft>
-                <a:spcPts val="600"/>
-              </a:spcAft>
-            </a:pPr>
-            <a:r>
-              <a:rPr sz="1500">
-                <a:solidFill>
-                  <a:srgbClr val="22282E"/>
-                </a:solidFill>
-              </a:rPr>
-              <a:t>•  Porque incluye cabeceras, cookies y cuerpo exactos; sqlmap testea todo el contexto real.</a:t>
-            </a:r>
-          </a:p>
-          <a:p>
-            <a:pPr>
-              <a:spcAft>
-                <a:spcPts val="600"/>
-              </a:spcAft>
-            </a:pPr>
-            <a:r>
-              <a:rPr sz="1500">
-                <a:solidFill>
-                  <a:srgbClr val="22282E"/>
-                </a:solidFill>
-              </a:rPr>
-              <a:t>•  ❓ ¿Es seguro usar --dump en producción?</a:t>
-            </a:r>
-          </a:p>
-          <a:p>
-            <a:pPr>
-              <a:spcAft>
-                <a:spcPts val="600"/>
-              </a:spcAft>
-            </a:pPr>
-            <a:r>
-              <a:rPr sz="1500">
-                <a:solidFill>
-                  <a:srgbClr val="22282E"/>
-                </a:solidFill>
-              </a:rPr>
-              <a:t>•  No sin autorización. Extrae datos reales y puede violar privacidad y ley. Solo en labs o con permiso escrito.</a:t>
+              <a:t>•  Con una única request de Burp, usa sqlmap para volcar la tabla de usuarios de DVWA y luego reproduce manualmente uno de los payloads que sqlmap generó, entendiéndolo.</a:t>
+            </a:r>
+          </a:p>
+          <a:p>
+            <a:pPr>
+              <a:spcAft>
+                <a:spcPts val="600"/>
+              </a:spcAft>
+            </a:pPr>
+            <a:r>
+              <a:rPr sz="1500">
+                <a:solidFill>
+                  <a:srgbClr val="22282E"/>
+                </a:solidFill>
+              </a:rPr>
+              <a:t>•  Criterio de aceptación: entregas el CSV volcado, el comando exacto y una explicación de un payload de sqlmap (no basta con "funcionó").</a:t>
             </a:r>
           </a:p>
         </p:txBody>
@@ -3511,7 +3469,7 @@
                   <a:srgbClr val="0B3D2E"/>
                 </a:solidFill>
               </a:rPr>
-              <a:t>🔗 Referencias</a:t>
+              <a:t>⚠️ Errores comunes</a:t>
             </a:r>
           </a:p>
         </p:txBody>
@@ -3549,6 +3507,319 @@
                   <a:srgbClr val="22282E"/>
                 </a:solidFill>
               </a:rPr>
+              <a:t>•  "all tested parameters do not appear to be injectable" — Sube --level/--risk o revisa el parámetro correcto</a:t>
+            </a:r>
+          </a:p>
+          <a:p>
+            <a:pPr>
+              <a:spcAft>
+                <a:spcPts val="600"/>
+              </a:spcAft>
+            </a:pPr>
+            <a:r>
+              <a:rPr sz="1500">
+                <a:solidFill>
+                  <a:srgbClr val="22282E"/>
+                </a:solidFill>
+              </a:rPr>
+              <a:t>•  No respeta la sesión — Falta --cookie o el token caducó</a:t>
+            </a:r>
+          </a:p>
+          <a:p>
+            <a:pPr>
+              <a:spcAft>
+                <a:spcPts val="600"/>
+              </a:spcAft>
+            </a:pPr>
+            <a:r>
+              <a:rPr sz="1500">
+                <a:solidFill>
+                  <a:srgbClr val="22282E"/>
+                </a:solidFill>
+              </a:rPr>
+              <a:t>•  Escaneo eterno — Limita --technique y usa --batch</a:t>
+            </a:r>
+          </a:p>
+          <a:p>
+            <a:pPr>
+              <a:spcAft>
+                <a:spcPts val="600"/>
+              </a:spcAft>
+            </a:pPr>
+            <a:r>
+              <a:rPr sz="1500">
+                <a:solidFill>
+                  <a:srgbClr val="22282E"/>
+                </a:solidFill>
+              </a:rPr>
+              <a:t>•  Datos corruptos por --risk=3 — Payloads stacked; baja el riesgo</a:t>
+            </a:r>
+          </a:p>
+          <a:p>
+            <a:pPr>
+              <a:spcAft>
+                <a:spcPts val="600"/>
+              </a:spcAft>
+            </a:pPr>
+            <a:r>
+              <a:rPr sz="1500">
+                <a:solidFill>
+                  <a:srgbClr val="22282E"/>
+                </a:solidFill>
+              </a:rPr>
+              <a:t>•  Bloqueado por WAF — Prueba tamper scripts adecuados, con permiso</a:t>
+            </a:r>
+          </a:p>
+        </p:txBody>
+      </p:sp>
+    </p:spTree>
+  </p:cSld>
+  <p:clrMapOvr>
+    <a:masterClrMapping/>
+  </p:clrMapOvr>
+</p:sld>
+</file>
+
+<file path=ppt/slides/slide13.xml><?xml version="1.0" encoding="utf-8"?>
+<p:sld xmlns:a="http://schemas.openxmlformats.org/drawingml/2006/main" xmlns:p="http://schemas.openxmlformats.org/presentationml/2006/main" xmlns:r="http://schemas.openxmlformats.org/officeDocument/2006/relationships">
+  <p:cSld>
+    <p:spTree>
+      <p:nvGrpSpPr>
+        <p:cNvPr id="1" name=""/>
+        <p:cNvGrpSpPr/>
+        <p:nvPr/>
+      </p:nvGrpSpPr>
+      <p:grpSpPr/>
+      <p:sp>
+        <p:nvSpPr>
+          <p:cNvPr id="2" name="TextBox 1"/>
+          <p:cNvSpPr txBox="1"/>
+          <p:nvPr/>
+        </p:nvSpPr>
+        <p:spPr>
+          <a:xfrm>
+            <a:off x="457200" y="320040"/>
+            <a:ext cx="8229600" cy="822960"/>
+          </a:xfrm>
+          <a:prstGeom prst="rect">
+            <a:avLst/>
+          </a:prstGeom>
+          <a:noFill/>
+        </p:spPr>
+        <p:txBody>
+          <a:bodyPr wrap="square">
+            <a:spAutoFit/>
+          </a:bodyPr>
+          <a:lstStyle/>
+          <a:p>
+            <a:r>
+              <a:rPr sz="2600" b="1">
+                <a:solidFill>
+                  <a:srgbClr val="0B3D2E"/>
+                </a:solidFill>
+              </a:rPr>
+              <a:t>❓ Preguntas frecuentes</a:t>
+            </a:r>
+          </a:p>
+        </p:txBody>
+      </p:sp>
+      <p:sp>
+        <p:nvSpPr>
+          <p:cNvPr id="3" name="TextBox 2"/>
+          <p:cNvSpPr txBox="1"/>
+          <p:nvPr/>
+        </p:nvSpPr>
+        <p:spPr>
+          <a:xfrm>
+            <a:off x="457200" y="1280160"/>
+            <a:ext cx="8229600" cy="4937760"/>
+          </a:xfrm>
+          <a:prstGeom prst="rect">
+            <a:avLst/>
+          </a:prstGeom>
+          <a:noFill/>
+        </p:spPr>
+        <p:txBody>
+          <a:bodyPr wrap="square">
+            <a:spAutoFit/>
+          </a:bodyPr>
+          <a:lstStyle/>
+          <a:p>
+            <a:pPr>
+              <a:spcAft>
+                <a:spcPts val="600"/>
+              </a:spcAft>
+            </a:pPr>
+            <a:r>
+              <a:rPr sz="1500">
+                <a:solidFill>
+                  <a:srgbClr val="22282E"/>
+                </a:solidFill>
+              </a:rPr>
+              <a:t>•  ❓ ¿sqlmap sustituye al conocimiento manual?</a:t>
+            </a:r>
+          </a:p>
+          <a:p>
+            <a:pPr>
+              <a:spcAft>
+                <a:spcPts val="600"/>
+              </a:spcAft>
+            </a:pPr>
+            <a:r>
+              <a:rPr sz="1500">
+                <a:solidFill>
+                  <a:srgbClr val="22282E"/>
+                </a:solidFill>
+              </a:rPr>
+              <a:t>•  No. Automatiza lo tedioso, pero necesitas entender la SQLi para dirigirla, validar resultados y evitar destrozos.</a:t>
+            </a:r>
+          </a:p>
+          <a:p>
+            <a:pPr>
+              <a:spcAft>
+                <a:spcPts val="600"/>
+              </a:spcAft>
+            </a:pPr>
+            <a:r>
+              <a:rPr sz="1500">
+                <a:solidFill>
+                  <a:srgbClr val="22282E"/>
+                </a:solidFill>
+              </a:rPr>
+              <a:t>•  ❓ ¿Por qué empezar con la request de Burp?</a:t>
+            </a:r>
+          </a:p>
+          <a:p>
+            <a:pPr>
+              <a:spcAft>
+                <a:spcPts val="600"/>
+              </a:spcAft>
+            </a:pPr>
+            <a:r>
+              <a:rPr sz="1500">
+                <a:solidFill>
+                  <a:srgbClr val="22282E"/>
+                </a:solidFill>
+              </a:rPr>
+              <a:t>•  Porque incluye cabeceras, cookies y cuerpo exactos; sqlmap testea todo el contexto real.</a:t>
+            </a:r>
+          </a:p>
+          <a:p>
+            <a:pPr>
+              <a:spcAft>
+                <a:spcPts val="600"/>
+              </a:spcAft>
+            </a:pPr>
+            <a:r>
+              <a:rPr sz="1500">
+                <a:solidFill>
+                  <a:srgbClr val="22282E"/>
+                </a:solidFill>
+              </a:rPr>
+              <a:t>•  ❓ ¿Es seguro usar --dump en producción?</a:t>
+            </a:r>
+          </a:p>
+          <a:p>
+            <a:pPr>
+              <a:spcAft>
+                <a:spcPts val="600"/>
+              </a:spcAft>
+            </a:pPr>
+            <a:r>
+              <a:rPr sz="1500">
+                <a:solidFill>
+                  <a:srgbClr val="22282E"/>
+                </a:solidFill>
+              </a:rPr>
+              <a:t>•  No sin autorización. Extrae datos reales y puede violar privacidad y ley. Solo en labs o con permiso escrito.</a:t>
+            </a:r>
+          </a:p>
+        </p:txBody>
+      </p:sp>
+    </p:spTree>
+  </p:cSld>
+  <p:clrMapOvr>
+    <a:masterClrMapping/>
+  </p:clrMapOvr>
+</p:sld>
+</file>
+
+<file path=ppt/slides/slide14.xml><?xml version="1.0" encoding="utf-8"?>
+<p:sld xmlns:a="http://schemas.openxmlformats.org/drawingml/2006/main" xmlns:p="http://schemas.openxmlformats.org/presentationml/2006/main" xmlns:r="http://schemas.openxmlformats.org/officeDocument/2006/relationships">
+  <p:cSld>
+    <p:spTree>
+      <p:nvGrpSpPr>
+        <p:cNvPr id="1" name=""/>
+        <p:cNvGrpSpPr/>
+        <p:nvPr/>
+      </p:nvGrpSpPr>
+      <p:grpSpPr/>
+      <p:sp>
+        <p:nvSpPr>
+          <p:cNvPr id="2" name="TextBox 1"/>
+          <p:cNvSpPr txBox="1"/>
+          <p:nvPr/>
+        </p:nvSpPr>
+        <p:spPr>
+          <a:xfrm>
+            <a:off x="457200" y="320040"/>
+            <a:ext cx="8229600" cy="822960"/>
+          </a:xfrm>
+          <a:prstGeom prst="rect">
+            <a:avLst/>
+          </a:prstGeom>
+          <a:noFill/>
+        </p:spPr>
+        <p:txBody>
+          <a:bodyPr wrap="square">
+            <a:spAutoFit/>
+          </a:bodyPr>
+          <a:lstStyle/>
+          <a:p>
+            <a:r>
+              <a:rPr sz="2600" b="1">
+                <a:solidFill>
+                  <a:srgbClr val="0B3D2E"/>
+                </a:solidFill>
+              </a:rPr>
+              <a:t>🔗 Referencias</a:t>
+            </a:r>
+          </a:p>
+        </p:txBody>
+      </p:sp>
+      <p:sp>
+        <p:nvSpPr>
+          <p:cNvPr id="3" name="TextBox 2"/>
+          <p:cNvSpPr txBox="1"/>
+          <p:nvPr/>
+        </p:nvSpPr>
+        <p:spPr>
+          <a:xfrm>
+            <a:off x="457200" y="1280160"/>
+            <a:ext cx="8229600" cy="4937760"/>
+          </a:xfrm>
+          <a:prstGeom prst="rect">
+            <a:avLst/>
+          </a:prstGeom>
+          <a:noFill/>
+        </p:spPr>
+        <p:txBody>
+          <a:bodyPr wrap="square">
+            <a:spAutoFit/>
+          </a:bodyPr>
+          <a:lstStyle/>
+          <a:p>
+            <a:pPr>
+              <a:spcAft>
+                <a:spcPts val="600"/>
+              </a:spcAft>
+            </a:pPr>
+            <a:r>
+              <a:rPr sz="1500">
+                <a:solidFill>
+                  <a:srgbClr val="22282E"/>
+                </a:solidFill>
+              </a:rPr>
               <a:t>•  sqlmap: &lt;https://sqlmap.org/&gt;</a:t>
             </a:r>
           </a:p>
@@ -3584,6 +3855,81 @@
           </a:p>
         </p:txBody>
       </p:sp>
+    </p:spTree>
+  </p:cSld>
+  <p:clrMapOvr>
+    <a:masterClrMapping/>
+  </p:clrMapOvr>
+</p:sld>
+</file>
+
+<file path=ppt/slides/slide15.xml><?xml version="1.0" encoding="utf-8"?>
+<p:sld xmlns:a="http://schemas.openxmlformats.org/drawingml/2006/main" xmlns:p="http://schemas.openxmlformats.org/presentationml/2006/main" xmlns:r="http://schemas.openxmlformats.org/officeDocument/2006/relationships">
+  <p:cSld>
+    <p:spTree>
+      <p:nvGrpSpPr>
+        <p:cNvPr id="1" name=""/>
+        <p:cNvGrpSpPr/>
+        <p:nvPr/>
+      </p:nvGrpSpPr>
+      <p:grpSpPr/>
+      <p:sp>
+        <p:nvSpPr>
+          <p:cNvPr id="2" name="TextBox 1"/>
+          <p:cNvSpPr txBox="1"/>
+          <p:nvPr/>
+        </p:nvSpPr>
+        <p:spPr>
+          <a:xfrm>
+            <a:off x="457200" y="274320"/>
+            <a:ext cx="8229600" cy="640080"/>
+          </a:xfrm>
+          <a:prstGeom prst="rect">
+            <a:avLst/>
+          </a:prstGeom>
+          <a:noFill/>
+        </p:spPr>
+        <p:txBody>
+          <a:bodyPr wrap="square">
+            <a:spAutoFit/>
+          </a:bodyPr>
+          <a:lstStyle/>
+          <a:p>
+            <a:r>
+              <a:rPr sz="2200" b="1">
+                <a:solidFill>
+                  <a:srgbClr val="0B3D2E"/>
+                </a:solidFill>
+              </a:rPr>
+              <a:t>Diagrama de la clase</a:t>
+            </a:r>
+          </a:p>
+        </p:txBody>
+      </p:sp>
+      <p:pic>
+        <p:nvPicPr>
+          <p:cNvPr id="3" name="Picture 2" descr="14726678bfcb5a79.png"/>
+          <p:cNvPicPr>
+            <a:picLocks noChangeAspect="1"/>
+          </p:cNvPicPr>
+          <p:nvPr/>
+        </p:nvPicPr>
+        <p:blipFill>
+          <a:blip r:embed="rId2"/>
+          <a:stretch>
+            <a:fillRect/>
+          </a:stretch>
+        </p:blipFill>
+        <p:spPr>
+          <a:xfrm>
+            <a:off x="457200" y="3191256"/>
+            <a:ext cx="8229600" cy="1115568"/>
+          </a:xfrm>
+          <a:prstGeom prst="rect">
+            <a:avLst/>
+          </a:prstGeom>
+        </p:spPr>
+      </p:pic>
     </p:spTree>
   </p:cSld>
   <p:clrMapOvr>
@@ -3668,7 +4014,7 @@
                   <a:srgbClr val="22282E"/>
                 </a:solidFill>
               </a:rPr>
-              <a:t>•  Automatizar la detección y explotación de SQLi con sqlmap, la herramienta de referencia. Aprenderás a usarla con criterio: alimentarla con peticiones reales de Burp, ajustar niveles/riesgos y extraer datos, sin convertirla en un botón mágico que dispara a ciegas.</a:t>
+              <a:t>•  Automatizar la detección y explotación de SQLi con sqlmap, la herramienta de referencia. Aprenderás a usarla con criterio: alimentarla con peticiones reales de Burp, ajustar niveles/riesgos y extraer…</a:t>
             </a:r>
           </a:p>
         </p:txBody>
@@ -4062,7 +4408,7 @@
                   <a:srgbClr val="0B3D2E"/>
                 </a:solidFill>
               </a:rPr>
-              <a:t>📖 Definiciones y características</a:t>
+              <a:t>🧠 Explicación en profundidad</a:t>
             </a:r>
           </a:p>
         </p:txBody>
@@ -4100,82 +4446,97 @@
                   <a:srgbClr val="22282E"/>
                 </a:solidFill>
               </a:rPr>
-              <a:t>•  sqlmap: herramienta open source que automatiza SQLi de extremo a extremo. Característica: soporta múltiples motores y técnicas.</a:t>
-            </a:r>
-          </a:p>
-          <a:p>
-            <a:pPr>
-              <a:spcAft>
-                <a:spcPts val="600"/>
-              </a:spcAft>
-            </a:pPr>
-            <a:r>
-              <a:rPr sz="1500">
-                <a:solidFill>
-                  <a:srgbClr val="22282E"/>
-                </a:solidFill>
-              </a:rPr>
-              <a:t>•  --level (1–5): cuántos vectores prueba (parámetros, cabeceras). Característica: más nivel = más cobertura y ruido.</a:t>
-            </a:r>
-          </a:p>
-          <a:p>
-            <a:pPr>
-              <a:spcAft>
-                <a:spcPts val="600"/>
-              </a:spcAft>
-            </a:pPr>
-            <a:r>
-              <a:rPr sz="1500">
-                <a:solidFill>
-                  <a:srgbClr val="22282E"/>
-                </a:solidFill>
-              </a:rPr>
-              <a:t>•  --risk (1–3): cuán agresivos son los payloads. Característica: riesgo alto puede modificar datos.</a:t>
-            </a:r>
-          </a:p>
-          <a:p>
-            <a:pPr>
-              <a:spcAft>
-                <a:spcPts val="600"/>
-              </a:spcAft>
-            </a:pPr>
-            <a:r>
-              <a:rPr sz="1500">
-                <a:solidFill>
-                  <a:srgbClr val="22282E"/>
-                </a:solidFill>
-              </a:rPr>
-              <a:t>•  Técnica (B,E,U,S,T,Q): booleana, error, union, stacked, temporal, inline. Característica: se seleccionan con --technique.</a:t>
-            </a:r>
-          </a:p>
-          <a:p>
-            <a:pPr>
-              <a:spcAft>
-                <a:spcPts val="600"/>
-              </a:spcAft>
-            </a:pPr>
-            <a:r>
-              <a:rPr sz="1500">
-                <a:solidFill>
-                  <a:srgbClr val="22282E"/>
-                </a:solidFill>
-              </a:rPr>
-              <a:t>•  Tamper script: transforma payloads para evadir filtros. Característica: no sustituye a entender el WAF.</a:t>
-            </a:r>
-          </a:p>
-          <a:p>
-            <a:pPr>
-              <a:spcAft>
-                <a:spcPts val="600"/>
-              </a:spcAft>
-            </a:pPr>
-            <a:r>
-              <a:rPr sz="1500">
-                <a:solidFill>
-                  <a:srgbClr val="22282E"/>
-                </a:solidFill>
-              </a:rPr>
-              <a:t>•  --dump: exfiltra el contenido de tablas. Característica: guarda los datos localmente en CSV.</a:t>
+              <a:t>•  SQLMap automatiza la detección y explotación de inyección SQL: prueba decenas de técnicas</a:t>
+            </a:r>
+          </a:p>
+          <a:p>
+            <a:pPr>
+              <a:spcAft>
+                <a:spcPts val="600"/>
+              </a:spcAft>
+            </a:pPr>
+            <a:r>
+              <a:rPr sz="1500">
+                <a:solidFill>
+                  <a:srgbClr val="22282E"/>
+                </a:solidFill>
+              </a:rPr>
+              <a:t>•  (UNION, booleana, temporal, OOB, por errores), identifica el motor, enumera el esquema y vuelca</a:t>
+            </a:r>
+          </a:p>
+          <a:p>
+            <a:pPr>
+              <a:spcAft>
+                <a:spcPts val="600"/>
+              </a:spcAft>
+            </a:pPr>
+            <a:r>
+              <a:rPr sz="1500">
+                <a:solidFill>
+                  <a:srgbClr val="22282E"/>
+                </a:solidFill>
+              </a:rPr>
+              <a:t>•  los datos, todo con una fiabilidad y una velocidad imposibles a mano. Es una herramienta</a:t>
+            </a:r>
+          </a:p>
+          <a:p>
+            <a:pPr>
+              <a:spcAft>
+                <a:spcPts val="600"/>
+              </a:spcAft>
+            </a:pPr>
+            <a:r>
+              <a:rPr sz="1500">
+                <a:solidFill>
+                  <a:srgbClr val="22282E"/>
+                </a:solidFill>
+              </a:rPr>
+              <a:t>•  enormemente potente, y precisamente por eso su clase pone el acento en usarla con criterio y</a:t>
+            </a:r>
+          </a:p>
+          <a:p>
+            <a:pPr>
+              <a:spcAft>
+                <a:spcPts val="600"/>
+              </a:spcAft>
+            </a:pPr>
+            <a:r>
+              <a:rPr sz="1500">
+                <a:solidFill>
+                  <a:srgbClr val="22282E"/>
+                </a:solidFill>
+              </a:rPr>
+              <a:t>•  con permiso: SQLMap es intrusiva por naturaleza —envía miles de peticiones que quedan en los</a:t>
+            </a:r>
+          </a:p>
+          <a:p>
+            <a:pPr>
+              <a:spcAft>
+                <a:spcPts val="600"/>
+              </a:spcAft>
+            </a:pPr>
+            <a:r>
+              <a:rPr sz="1500">
+                <a:solidFill>
+                  <a:srgbClr val="22282E"/>
+                </a:solidFill>
+              </a:rPr>
+              <a:t>•  logs y, con ciertas opciones, modifica o extrae datos reales—, así que solo se lanza dentro del</a:t>
+            </a:r>
+          </a:p>
+          <a:p>
+            <a:pPr>
+              <a:spcAft>
+                <a:spcPts val="600"/>
+              </a:spcAft>
+            </a:pPr>
+            <a:r>
+              <a:rPr sz="1500">
+                <a:solidFill>
+                  <a:srgbClr val="22282E"/>
+                </a:solidFill>
+              </a:rPr>
+              <a:t>•  alcance autorizado (clase 067).</a:t>
             </a:r>
           </a:p>
         </p:txBody>
@@ -4226,7 +4587,7 @@
                   <a:srgbClr val="0B3D2E"/>
                 </a:solidFill>
               </a:rPr>
-              <a:t>🧰 Herramientas y preparación</a:t>
+              <a:t>📖 Definiciones y características</a:t>
             </a:r>
           </a:p>
         </p:txBody>
@@ -4264,52 +4625,82 @@
                   <a:srgbClr val="22282E"/>
                 </a:solidFill>
               </a:rPr>
-              <a:t>•  sqlmap (Python).</a:t>
-            </a:r>
-          </a:p>
-          <a:p>
-            <a:pPr>
-              <a:spcAft>
-                <a:spcPts val="600"/>
-              </a:spcAft>
-            </a:pPr>
-            <a:r>
-              <a:rPr sz="1500">
-                <a:solidFill>
-                  <a:srgbClr val="22282E"/>
-                </a:solidFill>
-              </a:rPr>
-              <a:t>•  Burp para capturar la petición y guardarla como archivo .txt.</a:t>
-            </a:r>
-          </a:p>
-          <a:p>
-            <a:pPr>
-              <a:spcAft>
-                <a:spcPts val="600"/>
-              </a:spcAft>
-            </a:pPr>
-            <a:r>
-              <a:rPr sz="1500">
-                <a:solidFill>
-                  <a:srgbClr val="22282E"/>
-                </a:solidFill>
-              </a:rPr>
-              <a:t>•  sudo apt install sqlmap    # o: git clone https://github.com/sqlmapproject/sqlmap</a:t>
-            </a:r>
-          </a:p>
-          <a:p>
-            <a:pPr>
-              <a:spcAft>
-                <a:spcPts val="600"/>
-              </a:spcAft>
-            </a:pPr>
-            <a:r>
-              <a:rPr sz="1500">
-                <a:solidFill>
-                  <a:srgbClr val="22282E"/>
-                </a:solidFill>
-              </a:rPr>
-              <a:t>•  sqlmap --version</a:t>
+              <a:t>•  sqlmap: herramienta open source que automatiza SQLi de extremo a extremo. Característica: soporta múltiples motores y técnicas.</a:t>
+            </a:r>
+          </a:p>
+          <a:p>
+            <a:pPr>
+              <a:spcAft>
+                <a:spcPts val="600"/>
+              </a:spcAft>
+            </a:pPr>
+            <a:r>
+              <a:rPr sz="1500">
+                <a:solidFill>
+                  <a:srgbClr val="22282E"/>
+                </a:solidFill>
+              </a:rPr>
+              <a:t>•  --level (1–5): cuántos vectores prueba (parámetros, cabeceras). Característica: más nivel = más cobertura y ruido.</a:t>
+            </a:r>
+          </a:p>
+          <a:p>
+            <a:pPr>
+              <a:spcAft>
+                <a:spcPts val="600"/>
+              </a:spcAft>
+            </a:pPr>
+            <a:r>
+              <a:rPr sz="1500">
+                <a:solidFill>
+                  <a:srgbClr val="22282E"/>
+                </a:solidFill>
+              </a:rPr>
+              <a:t>•  --risk (1–3): cuán agresivos son los payloads. Característica: riesgo alto puede modificar datos.</a:t>
+            </a:r>
+          </a:p>
+          <a:p>
+            <a:pPr>
+              <a:spcAft>
+                <a:spcPts val="600"/>
+              </a:spcAft>
+            </a:pPr>
+            <a:r>
+              <a:rPr sz="1500">
+                <a:solidFill>
+                  <a:srgbClr val="22282E"/>
+                </a:solidFill>
+              </a:rPr>
+              <a:t>•  Técnica (B,E,U,S,T,Q): booleana, error, union, stacked, temporal, inline. Característica: se seleccionan con --technique.</a:t>
+            </a:r>
+          </a:p>
+          <a:p>
+            <a:pPr>
+              <a:spcAft>
+                <a:spcPts val="600"/>
+              </a:spcAft>
+            </a:pPr>
+            <a:r>
+              <a:rPr sz="1500">
+                <a:solidFill>
+                  <a:srgbClr val="22282E"/>
+                </a:solidFill>
+              </a:rPr>
+              <a:t>•  Tamper script: transforma payloads para evadir filtros. Característica: no sustituye a entender el WAF.</a:t>
+            </a:r>
+          </a:p>
+          <a:p>
+            <a:pPr>
+              <a:spcAft>
+                <a:spcPts val="600"/>
+              </a:spcAft>
+            </a:pPr>
+            <a:r>
+              <a:rPr sz="1500">
+                <a:solidFill>
+                  <a:srgbClr val="22282E"/>
+                </a:solidFill>
+              </a:rPr>
+              <a:t>•  --dump: exfiltra el contenido de tablas. Característica: guarda los datos localmente en CSV.</a:t>
             </a:r>
           </a:p>
         </p:txBody>
@@ -4360,7 +4751,7 @@
                   <a:srgbClr val="0B3D2E"/>
                 </a:solidFill>
               </a:rPr>
-              <a:t>🧪 Laboratorio guiado</a:t>
+              <a:t>📔 Glosario</a:t>
             </a:r>
           </a:p>
         </p:txBody>
@@ -4398,97 +4789,97 @@
                   <a:srgbClr val="22282E"/>
                 </a:solidFill>
               </a:rPr>
-              <a:t>•  En DVWA, captura la petición vulnerable con Burp y guárdala como req.txt (clic derecho → Copy to file).</a:t>
-            </a:r>
-          </a:p>
-          <a:p>
-            <a:pPr>
-              <a:spcAft>
-                <a:spcPts val="600"/>
-              </a:spcAft>
-            </a:pPr>
-            <a:r>
-              <a:rPr sz="1500">
-                <a:solidFill>
-                  <a:srgbClr val="22282E"/>
-                </a:solidFill>
-              </a:rPr>
-              <a:t>•  Lanza sqlmap sobre esa request:</a:t>
-            </a:r>
-          </a:p>
-          <a:p>
-            <a:pPr>
-              <a:spcAft>
-                <a:spcPts val="600"/>
-              </a:spcAft>
-            </a:pPr>
-            <a:r>
-              <a:rPr sz="1500">
-                <a:solidFill>
-                  <a:srgbClr val="22282E"/>
-                </a:solidFill>
-              </a:rPr>
-              <a:t>•  sqlmap -r req.txt -p id --batch</a:t>
-            </a:r>
-          </a:p>
-          <a:p>
-            <a:pPr>
-              <a:spcAft>
-                <a:spcPts val="600"/>
-              </a:spcAft>
-            </a:pPr>
-            <a:r>
-              <a:rPr sz="1500">
-                <a:solidFill>
-                  <a:srgbClr val="22282E"/>
-                </a:solidFill>
-              </a:rPr>
-              <a:t>•  Si detecta inyección, enumera bases de datos:</a:t>
-            </a:r>
-          </a:p>
-          <a:p>
-            <a:pPr>
-              <a:spcAft>
-                <a:spcPts val="600"/>
-              </a:spcAft>
-            </a:pPr>
-            <a:r>
-              <a:rPr sz="1500">
-                <a:solidFill>
-                  <a:srgbClr val="22282E"/>
-                </a:solidFill>
-              </a:rPr>
-              <a:t>•  sqlmap -r req.txt -p id --dbs</a:t>
-            </a:r>
-          </a:p>
-          <a:p>
-            <a:pPr>
-              <a:spcAft>
-                <a:spcPts val="600"/>
-              </a:spcAft>
-            </a:pPr>
-            <a:r>
-              <a:rPr sz="1500">
-                <a:solidFill>
-                  <a:srgbClr val="22282E"/>
-                </a:solidFill>
-              </a:rPr>
-              <a:t>•  Lista tablas y columnas de la base objetivo:</a:t>
-            </a:r>
-          </a:p>
-          <a:p>
-            <a:pPr>
-              <a:spcAft>
-                <a:spcPts val="600"/>
-              </a:spcAft>
-            </a:pPr>
-            <a:r>
-              <a:rPr sz="1500">
-                <a:solidFill>
-                  <a:srgbClr val="22282E"/>
-                </a:solidFill>
-              </a:rPr>
-              <a:t>•  sqlmap -r req.txt -p id -D dvwa --tables</a:t>
+              <a:t>•  Término — Definición concisa</a:t>
+            </a:r>
+          </a:p>
+          <a:p>
+            <a:pPr>
+              <a:spcAft>
+                <a:spcPts val="600"/>
+              </a:spcAft>
+            </a:pPr>
+            <a:r>
+              <a:rPr sz="1500">
+                <a:solidFill>
+                  <a:srgbClr val="22282E"/>
+                </a:solidFill>
+              </a:rPr>
+              <a:t>•  SQLMap — Herramienta que automatiza detección y explotación de SQLi</a:t>
+            </a:r>
+          </a:p>
+          <a:p>
+            <a:pPr>
+              <a:spcAft>
+                <a:spcPts val="600"/>
+              </a:spcAft>
+            </a:pPr>
+            <a:r>
+              <a:rPr sz="1500">
+                <a:solidFill>
+                  <a:srgbClr val="22282E"/>
+                </a:solidFill>
+              </a:rPr>
+              <a:t>•  -u — Objetivo indicado como URL</a:t>
+            </a:r>
+          </a:p>
+          <a:p>
+            <a:pPr>
+              <a:spcAft>
+                <a:spcPts val="600"/>
+              </a:spcAft>
+            </a:pPr>
+            <a:r>
+              <a:rPr sz="1500">
+                <a:solidFill>
+                  <a:srgbClr val="22282E"/>
+                </a:solidFill>
+              </a:rPr>
+              <a:t>•  -r — Objetivo tomado de una petición HTTP capturada</a:t>
+            </a:r>
+          </a:p>
+          <a:p>
+            <a:pPr>
+              <a:spcAft>
+                <a:spcPts val="600"/>
+              </a:spcAft>
+            </a:pPr>
+            <a:r>
+              <a:rPr sz="1500">
+                <a:solidFill>
+                  <a:srgbClr val="22282E"/>
+                </a:solidFill>
+              </a:rPr>
+              <a:t>•  --level (1-5) — Amplía dónde busca (cabeceras, cookies…); más peticiones</a:t>
+            </a:r>
+          </a:p>
+          <a:p>
+            <a:pPr>
+              <a:spcAft>
+                <a:spcPts val="600"/>
+              </a:spcAft>
+            </a:pPr>
+            <a:r>
+              <a:rPr sz="1500">
+                <a:solidFill>
+                  <a:srgbClr val="22282E"/>
+                </a:solidFill>
+              </a:rPr>
+              <a:t>•  --risk (1-3) — Amplía qué payloads prueba; el alto puede modificar datos</a:t>
+            </a:r>
+          </a:p>
+          <a:p>
+            <a:pPr>
+              <a:spcAft>
+                <a:spcPts val="600"/>
+              </a:spcAft>
+            </a:pPr>
+            <a:r>
+              <a:rPr sz="1500">
+                <a:solidFill>
+                  <a:srgbClr val="22282E"/>
+                </a:solidFill>
+              </a:rPr>
+              <a:t>•  --dbs — Lista las bases de datos</a:t>
             </a:r>
           </a:p>
         </p:txBody>
@@ -4539,7 +4930,7 @@
                   <a:srgbClr val="0B3D2E"/>
                 </a:solidFill>
               </a:rPr>
-              <a:t>✍️ Ejercicios</a:t>
+              <a:t>🧰 Herramientas y preparación</a:t>
             </a:r>
           </a:p>
         </p:txBody>
@@ -4577,82 +4968,22 @@
                   <a:srgbClr val="22282E"/>
                 </a:solidFill>
               </a:rPr>
-              <a:t>•  Detecta el motor y la versión con --banner.</a:t>
-            </a:r>
-          </a:p>
-          <a:p>
-            <a:pPr>
-              <a:spcAft>
-                <a:spcPts val="600"/>
-              </a:spcAft>
-            </a:pPr>
-            <a:r>
-              <a:rPr sz="1500">
-                <a:solidFill>
-                  <a:srgbClr val="22282E"/>
-                </a:solidFill>
-              </a:rPr>
-              <a:t>•  Compara resultados con --technique=BT vs. la selección automática.</a:t>
-            </a:r>
-          </a:p>
-          <a:p>
-            <a:pPr>
-              <a:spcAft>
-                <a:spcPts val="600"/>
-              </a:spcAft>
-            </a:pPr>
-            <a:r>
-              <a:rPr sz="1500">
-                <a:solidFill>
-                  <a:srgbClr val="22282E"/>
-                </a:solidFill>
-              </a:rPr>
-              <a:t>•  Usa --tamper=space2comment contra un filtro que bloquea espacios.</a:t>
-            </a:r>
-          </a:p>
-          <a:p>
-            <a:pPr>
-              <a:spcAft>
-                <a:spcPts val="600"/>
-              </a:spcAft>
-            </a:pPr>
-            <a:r>
-              <a:rPr sz="1500">
-                <a:solidFill>
-                  <a:srgbClr val="22282E"/>
-                </a:solidFill>
-              </a:rPr>
-              <a:t>•  Volca solo el usuario admin usando --where.</a:t>
-            </a:r>
-          </a:p>
-          <a:p>
-            <a:pPr>
-              <a:spcAft>
-                <a:spcPts val="600"/>
-              </a:spcAft>
-            </a:pPr>
-            <a:r>
-              <a:rPr sz="1500">
-                <a:solidFill>
-                  <a:srgbClr val="22282E"/>
-                </a:solidFill>
-              </a:rPr>
-              <a:t>•  Explica por qué --os-shell es peligroso y cuándo (no) usarlo.</a:t>
-            </a:r>
-          </a:p>
-          <a:p>
-            <a:pPr>
-              <a:spcAft>
-                <a:spcPts val="600"/>
-              </a:spcAft>
-            </a:pPr>
-            <a:r>
-              <a:rPr sz="1500">
-                <a:solidFill>
-                  <a:srgbClr val="22282E"/>
-                </a:solidFill>
-              </a:rPr>
-              <a:t>•  Documenta el impacto real del dump: ¿qué datos y qué gravedad?</a:t>
+              <a:t>•  sqlmap (Python).</a:t>
+            </a:r>
+          </a:p>
+          <a:p>
+            <a:pPr>
+              <a:spcAft>
+                <a:spcPts val="600"/>
+              </a:spcAft>
+            </a:pPr>
+            <a:r>
+              <a:rPr sz="1500">
+                <a:solidFill>
+                  <a:srgbClr val="22282E"/>
+                </a:solidFill>
+              </a:rPr>
+              <a:t>•  Burp para capturar la petición y guardarla como archivo .txt.</a:t>
             </a:r>
           </a:p>
         </p:txBody>
@@ -4703,7 +5034,7 @@
                   <a:srgbClr val="0B3D2E"/>
                 </a:solidFill>
               </a:rPr>
-              <a:t>📝 Reto verificable</a:t>
+              <a:t>🧪 Laboratorio guiado</a:t>
             </a:r>
           </a:p>
         </p:txBody>
@@ -4741,22 +5072,97 @@
                   <a:srgbClr val="22282E"/>
                 </a:solidFill>
               </a:rPr>
-              <a:t>•  Con una única request de Burp, usa sqlmap para volcar la tabla de usuarios de DVWA y luego reproduce manualmente uno de los payloads que sqlmap generó, entendiéndolo.</a:t>
-            </a:r>
-          </a:p>
-          <a:p>
-            <a:pPr>
-              <a:spcAft>
-                <a:spcPts val="600"/>
-              </a:spcAft>
-            </a:pPr>
-            <a:r>
-              <a:rPr sz="1500">
-                <a:solidFill>
-                  <a:srgbClr val="22282E"/>
-                </a:solidFill>
-              </a:rPr>
-              <a:t>•  Criterio de aceptación: entregas el CSV volcado, el comando exacto y una explicación de un payload de sqlmap (no basta con "funcionó").</a:t>
+              <a:t>•  En DVWA, captura la petición vulnerable con Burp y guárdala como req.txt (clic derecho → Copy to file).</a:t>
+            </a:r>
+          </a:p>
+          <a:p>
+            <a:pPr>
+              <a:spcAft>
+                <a:spcPts val="600"/>
+              </a:spcAft>
+            </a:pPr>
+            <a:r>
+              <a:rPr sz="1500">
+                <a:solidFill>
+                  <a:srgbClr val="22282E"/>
+                </a:solidFill>
+              </a:rPr>
+              <a:t>•  Lanza sqlmap sobre esa request:</a:t>
+            </a:r>
+          </a:p>
+          <a:p>
+            <a:pPr>
+              <a:spcAft>
+                <a:spcPts val="600"/>
+              </a:spcAft>
+            </a:pPr>
+            <a:r>
+              <a:rPr sz="1500">
+                <a:solidFill>
+                  <a:srgbClr val="22282E"/>
+                </a:solidFill>
+              </a:rPr>
+              <a:t>•  Si detecta inyección, enumera bases de datos:</a:t>
+            </a:r>
+          </a:p>
+          <a:p>
+            <a:pPr>
+              <a:spcAft>
+                <a:spcPts val="600"/>
+              </a:spcAft>
+            </a:pPr>
+            <a:r>
+              <a:rPr sz="1500">
+                <a:solidFill>
+                  <a:srgbClr val="22282E"/>
+                </a:solidFill>
+              </a:rPr>
+              <a:t>•  Lista tablas y columnas de la base objetivo:</a:t>
+            </a:r>
+          </a:p>
+          <a:p>
+            <a:pPr>
+              <a:spcAft>
+                <a:spcPts val="600"/>
+              </a:spcAft>
+            </a:pPr>
+            <a:r>
+              <a:rPr sz="1500">
+                <a:solidFill>
+                  <a:srgbClr val="22282E"/>
+                </a:solidFill>
+              </a:rPr>
+              <a:t>•  Vuelca los datos sensibles:</a:t>
+            </a:r>
+          </a:p>
+          <a:p>
+            <a:pPr>
+              <a:spcAft>
+                <a:spcPts val="600"/>
+              </a:spcAft>
+            </a:pPr>
+            <a:r>
+              <a:rPr sz="1500">
+                <a:solidFill>
+                  <a:srgbClr val="22282E"/>
+                </a:solidFill>
+              </a:rPr>
+              <a:t>•  Prueba con autenticación pasando la cookie de sesión (--cookie) para DVWA nivel Medium.</a:t>
+            </a:r>
+          </a:p>
+          <a:p>
+            <a:pPr>
+              <a:spcAft>
+                <a:spcPts val="600"/>
+              </a:spcAft>
+            </a:pPr>
+            <a:r>
+              <a:rPr sz="1500">
+                <a:solidFill>
+                  <a:srgbClr val="22282E"/>
+                </a:solidFill>
+              </a:rPr>
+              <a:t>•  Sube el nivel/riesgo con cuidado (--level=3 --risk=2) y compara detecciones.</a:t>
             </a:r>
           </a:p>
         </p:txBody>
